--- a/m8/diapositivos/sessao-01-m8-f01.pptx
+++ b/m8/diapositivos/sessao-01-m8-f01.pptx
@@ -2516,7 +2516,41 @@
                 <a:ea typeface="Arial" pitchFamily="34" charset="-122"/>
                 <a:cs typeface="Arial" pitchFamily="34" charset="-120"/>
               </a:rPr>
-              <a:t>Antes deles, em 1915, Ângelo de Lima perguntava na revista Orpheu se «estes versos antigos» ainda lembravam a alguém; a pergunta acompanha o módulo inteiro.</a:t>
+              <a:t>Antes deles, em 1915, Ângelo de Lima perguntava na revista </a:t>
+            </a:r>
+            <a:pPr indent="0" marL="0">
+              <a:lnSpc>
+                <a:spcPct val="105000"/>
+              </a:lnSpc>
+              <a:buNone/>
+            </a:pPr>
+            <a:r>
+              <a:rPr lang="en-US" sz="2200" i="1" dirty="0">
+                <a:solidFill>
+                  <a:srgbClr val="F2F0EA"/>
+                </a:solidFill>
+                <a:latin typeface="Arial" pitchFamily="34" charset="0"/>
+                <a:ea typeface="Arial" pitchFamily="34" charset="-122"/>
+                <a:cs typeface="Arial" pitchFamily="34" charset="-120"/>
+              </a:rPr>
+              <a:t>Orpheu</a:t>
+            </a:r>
+            <a:pPr indent="0" marL="0">
+              <a:lnSpc>
+                <a:spcPct val="105000"/>
+              </a:lnSpc>
+              <a:buNone/>
+            </a:pPr>
+            <a:r>
+              <a:rPr lang="en-US" sz="2200" dirty="0">
+                <a:solidFill>
+                  <a:srgbClr val="F2F0EA"/>
+                </a:solidFill>
+                <a:latin typeface="Arial" pitchFamily="34" charset="0"/>
+                <a:ea typeface="Arial" pitchFamily="34" charset="-122"/>
+                <a:cs typeface="Arial" pitchFamily="34" charset="-120"/>
+              </a:rPr>
+              <a:t> se «estes versos antigos» ainda lembravam a alguém; a pergunta acompanha o módulo inteiro.</a:t>
             </a:r>
             <a:endParaRPr lang="en-US" sz="2200" dirty="0"/>
           </a:p>
@@ -4218,7 +4252,87 @@
                 <a:ea typeface="Georgia" pitchFamily="34" charset="-122"/>
                 <a:cs typeface="Georgia" pitchFamily="34" charset="-120"/>
               </a:rPr>
-              <a:t>Antes destes três poetas, em 1915, a revista Orpheu publicou poemas de Ângelo de Lima (Porto, 1872 – Lisboa, 1921), soldado em Moçambique e, desde 1901, internado no hospital de Rilhafoles; foram Fernando Pessoa e Mário de Sá-Carneiro que os escolheram. Um deles pergunta se «estes versos antigos» ainda lembram a alguém.</a:t>
+              <a:t>Antes destes três poetas, em 1915, a revista </a:t>
+            </a:r>
+            <a:pPr indent="0" marL="0">
+              <a:lnSpc>
+                <a:spcPct val="120000"/>
+              </a:lnSpc>
+              <a:spcAft>
+                <a:spcPts val="1000"/>
+              </a:spcAft>
+              <a:buNone/>
+            </a:pPr>
+            <a:r>
+              <a:rPr lang="en-US" sz="2300" i="1" dirty="0">
+                <a:solidFill>
+                  <a:srgbClr val="F2F0EA"/>
+                </a:solidFill>
+                <a:latin typeface="Georgia" pitchFamily="34" charset="0"/>
+                <a:ea typeface="Georgia" pitchFamily="34" charset="-122"/>
+                <a:cs typeface="Georgia" pitchFamily="34" charset="-120"/>
+              </a:rPr>
+              <a:t>Orpheu</a:t>
+            </a:r>
+            <a:pPr indent="0" marL="0">
+              <a:lnSpc>
+                <a:spcPct val="120000"/>
+              </a:lnSpc>
+              <a:spcAft>
+                <a:spcPts val="1000"/>
+              </a:spcAft>
+              <a:buNone/>
+            </a:pPr>
+            <a:r>
+              <a:rPr lang="en-US" sz="2300" dirty="0">
+                <a:solidFill>
+                  <a:srgbClr val="F2F0EA"/>
+                </a:solidFill>
+                <a:latin typeface="Georgia" pitchFamily="34" charset="0"/>
+                <a:ea typeface="Georgia" pitchFamily="34" charset="-122"/>
+                <a:cs typeface="Georgia" pitchFamily="34" charset="-120"/>
+              </a:rPr>
+              <a:t> publicou poemas de </a:t>
+            </a:r>
+            <a:pPr indent="0" marL="0">
+              <a:lnSpc>
+                <a:spcPct val="120000"/>
+              </a:lnSpc>
+              <a:spcAft>
+                <a:spcPts val="1000"/>
+              </a:spcAft>
+              <a:buNone/>
+            </a:pPr>
+            <a:r>
+              <a:rPr lang="en-US" sz="2300" b="1" dirty="0">
+                <a:solidFill>
+                  <a:srgbClr val="F2F0EA"/>
+                </a:solidFill>
+                <a:latin typeface="Georgia" pitchFamily="34" charset="0"/>
+                <a:ea typeface="Georgia" pitchFamily="34" charset="-122"/>
+                <a:cs typeface="Georgia" pitchFamily="34" charset="-120"/>
+              </a:rPr>
+              <a:t>Ângelo de Lima</a:t>
+            </a:r>
+            <a:pPr indent="0" marL="0">
+              <a:lnSpc>
+                <a:spcPct val="120000"/>
+              </a:lnSpc>
+              <a:spcAft>
+                <a:spcPts val="1000"/>
+              </a:spcAft>
+              <a:buNone/>
+            </a:pPr>
+            <a:r>
+              <a:rPr lang="en-US" sz="2300" dirty="0">
+                <a:solidFill>
+                  <a:srgbClr val="F2F0EA"/>
+                </a:solidFill>
+                <a:latin typeface="Georgia" pitchFamily="34" charset="0"/>
+                <a:ea typeface="Georgia" pitchFamily="34" charset="-122"/>
+                <a:cs typeface="Georgia" pitchFamily="34" charset="-120"/>
+              </a:rPr>
+              <a:t> (Porto, 1872 – Lisboa, 1921), soldado em Moçambique e, desde 1901, internado no hospital de Rilhafoles; foram Fernando Pessoa e Mário de Sá-Carneiro que os escolheram. Um deles pergunta se «estes versos antigos» ainda lembram a alguém.</a:t>
             </a:r>
             <a:endParaRPr lang="en-US" sz="2300" dirty="0"/>
           </a:p>
@@ -6130,7 +6244,7 @@
                 <a:ea typeface="Georgia" pitchFamily="34" charset="-122"/>
                 <a:cs typeface="Georgia" pitchFamily="34" charset="-120"/>
               </a:rPr>
-              <a:t>1. Representações do contemporâneo: que mundo, que tempo, que problemas aparecem?</a:t>
+              <a:t>**1.</a:t>
             </a:r>
             <a:endParaRPr lang="en-US" sz="2300" dirty="0"/>
           </a:p>
@@ -6153,11 +6267,8 @@
                 <a:ea typeface="Georgia" pitchFamily="34" charset="-122"/>
                 <a:cs typeface="Georgia" pitchFamily="34" charset="-120"/>
               </a:rPr>
-              <a:t>2. Tradição literária: que autores, formas ou mitos anteriores o poema retoma ou contesta?</a:t>
-            </a:r>
-            <a:endParaRPr lang="en-US" sz="2300" dirty="0"/>
-          </a:p>
-          <a:p>
+              <a:t>Representações do contemporâneo</a:t>
+            </a:r>
             <a:pPr indent="0" marL="0">
               <a:lnSpc>
                 <a:spcPct val="120000"/>
@@ -6168,7 +6279,7 @@
               <a:buNone/>
             </a:pPr>
             <a:r>
-              <a:rPr lang="en-US" sz="2300" dirty="0">
+              <a:rPr lang="en-US" sz="2300" b="1" dirty="0">
                 <a:solidFill>
                   <a:srgbClr val="F2F0EA"/>
                 </a:solidFill>
@@ -6176,11 +6287,8 @@
                 <a:ea typeface="Georgia" pitchFamily="34" charset="-122"/>
                 <a:cs typeface="Georgia" pitchFamily="34" charset="-120"/>
               </a:rPr>
-              <a:t>3. Figurações do poeta: como se vê quem escreve (testemunha, artesão, amante, voz de outros)?</a:t>
-            </a:r>
-            <a:endParaRPr lang="en-US" sz="2300" dirty="0"/>
-          </a:p>
-          <a:p>
+              <a:t>: que mundo, que tempo, que problemas aparecem? </a:t>
+            </a:r>
             <a:pPr indent="0" marL="0">
               <a:lnSpc>
                 <a:spcPct val="120000"/>
@@ -6199,7 +6307,236 @@
                 <a:ea typeface="Georgia" pitchFamily="34" charset="-122"/>
                 <a:cs typeface="Georgia" pitchFamily="34" charset="-120"/>
               </a:rPr>
-              <a:t>4. Arte poética: o poema fala da própria poesia? E sempre: forma (estrofes, métrica, rima ou verso livre) e recursos expressivos.</a:t>
+              <a:t>2.</a:t>
+            </a:r>
+            <a:endParaRPr lang="en-US" sz="2300" dirty="0"/>
+          </a:p>
+          <a:p>
+            <a:pPr indent="0" marL="0">
+              <a:lnSpc>
+                <a:spcPct val="120000"/>
+              </a:lnSpc>
+              <a:spcAft>
+                <a:spcPts val="1000"/>
+              </a:spcAft>
+              <a:buNone/>
+            </a:pPr>
+            <a:r>
+              <a:rPr lang="en-US" sz="2300" dirty="0">
+                <a:solidFill>
+                  <a:srgbClr val="F2F0EA"/>
+                </a:solidFill>
+                <a:latin typeface="Georgia" pitchFamily="34" charset="0"/>
+                <a:ea typeface="Georgia" pitchFamily="34" charset="-122"/>
+                <a:cs typeface="Georgia" pitchFamily="34" charset="-120"/>
+              </a:rPr>
+              <a:t>Tradição literária</a:t>
+            </a:r>
+            <a:pPr indent="0" marL="0">
+              <a:lnSpc>
+                <a:spcPct val="120000"/>
+              </a:lnSpc>
+              <a:spcAft>
+                <a:spcPts val="1000"/>
+              </a:spcAft>
+              <a:buNone/>
+            </a:pPr>
+            <a:r>
+              <a:rPr lang="en-US" sz="2300" b="1" dirty="0">
+                <a:solidFill>
+                  <a:srgbClr val="F2F0EA"/>
+                </a:solidFill>
+                <a:latin typeface="Georgia" pitchFamily="34" charset="0"/>
+                <a:ea typeface="Georgia" pitchFamily="34" charset="-122"/>
+                <a:cs typeface="Georgia" pitchFamily="34" charset="-120"/>
+              </a:rPr>
+              <a:t>: que autores, formas ou mitos anteriores o poema retoma ou contesta? </a:t>
+            </a:r>
+            <a:pPr indent="0" marL="0">
+              <a:lnSpc>
+                <a:spcPct val="120000"/>
+              </a:lnSpc>
+              <a:spcAft>
+                <a:spcPts val="1000"/>
+              </a:spcAft>
+              <a:buNone/>
+            </a:pPr>
+            <a:r>
+              <a:rPr lang="en-US" sz="2300" dirty="0">
+                <a:solidFill>
+                  <a:srgbClr val="F2F0EA"/>
+                </a:solidFill>
+                <a:latin typeface="Georgia" pitchFamily="34" charset="0"/>
+                <a:ea typeface="Georgia" pitchFamily="34" charset="-122"/>
+                <a:cs typeface="Georgia" pitchFamily="34" charset="-120"/>
+              </a:rPr>
+              <a:t>3.</a:t>
+            </a:r>
+            <a:endParaRPr lang="en-US" sz="2300" dirty="0"/>
+          </a:p>
+          <a:p>
+            <a:pPr indent="0" marL="0">
+              <a:lnSpc>
+                <a:spcPct val="120000"/>
+              </a:lnSpc>
+              <a:spcAft>
+                <a:spcPts val="1000"/>
+              </a:spcAft>
+              <a:buNone/>
+            </a:pPr>
+            <a:r>
+              <a:rPr lang="en-US" sz="2300" dirty="0">
+                <a:solidFill>
+                  <a:srgbClr val="F2F0EA"/>
+                </a:solidFill>
+                <a:latin typeface="Georgia" pitchFamily="34" charset="0"/>
+                <a:ea typeface="Georgia" pitchFamily="34" charset="-122"/>
+                <a:cs typeface="Georgia" pitchFamily="34" charset="-120"/>
+              </a:rPr>
+              <a:t>Figurações do poeta</a:t>
+            </a:r>
+            <a:pPr indent="0" marL="0">
+              <a:lnSpc>
+                <a:spcPct val="120000"/>
+              </a:lnSpc>
+              <a:spcAft>
+                <a:spcPts val="1000"/>
+              </a:spcAft>
+              <a:buNone/>
+            </a:pPr>
+            <a:r>
+              <a:rPr lang="en-US" sz="2300" b="1" dirty="0">
+                <a:solidFill>
+                  <a:srgbClr val="F2F0EA"/>
+                </a:solidFill>
+                <a:latin typeface="Georgia" pitchFamily="34" charset="0"/>
+                <a:ea typeface="Georgia" pitchFamily="34" charset="-122"/>
+                <a:cs typeface="Georgia" pitchFamily="34" charset="-120"/>
+              </a:rPr>
+              <a:t>: como se vê quem escreve (testemunha, artesão, amante, voz de outros)? </a:t>
+            </a:r>
+            <a:pPr indent="0" marL="0">
+              <a:lnSpc>
+                <a:spcPct val="120000"/>
+              </a:lnSpc>
+              <a:spcAft>
+                <a:spcPts val="1000"/>
+              </a:spcAft>
+              <a:buNone/>
+            </a:pPr>
+            <a:r>
+              <a:rPr lang="en-US" sz="2300" dirty="0">
+                <a:solidFill>
+                  <a:srgbClr val="F2F0EA"/>
+                </a:solidFill>
+                <a:latin typeface="Georgia" pitchFamily="34" charset="0"/>
+                <a:ea typeface="Georgia" pitchFamily="34" charset="-122"/>
+                <a:cs typeface="Georgia" pitchFamily="34" charset="-120"/>
+              </a:rPr>
+              <a:t>4.</a:t>
+            </a:r>
+            <a:endParaRPr lang="en-US" sz="2300" dirty="0"/>
+          </a:p>
+          <a:p>
+            <a:pPr indent="0" marL="0">
+              <a:lnSpc>
+                <a:spcPct val="120000"/>
+              </a:lnSpc>
+              <a:spcAft>
+                <a:spcPts val="1000"/>
+              </a:spcAft>
+              <a:buNone/>
+            </a:pPr>
+            <a:r>
+              <a:rPr lang="en-US" sz="2300" dirty="0">
+                <a:solidFill>
+                  <a:srgbClr val="F2F0EA"/>
+                </a:solidFill>
+                <a:latin typeface="Georgia" pitchFamily="34" charset="0"/>
+                <a:ea typeface="Georgia" pitchFamily="34" charset="-122"/>
+                <a:cs typeface="Georgia" pitchFamily="34" charset="-120"/>
+              </a:rPr>
+              <a:t>Arte poética</a:t>
+            </a:r>
+            <a:pPr indent="0" marL="0">
+              <a:lnSpc>
+                <a:spcPct val="120000"/>
+              </a:lnSpc>
+              <a:spcAft>
+                <a:spcPts val="1000"/>
+              </a:spcAft>
+              <a:buNone/>
+            </a:pPr>
+            <a:r>
+              <a:rPr lang="en-US" sz="2300" b="1" dirty="0">
+                <a:solidFill>
+                  <a:srgbClr val="F2F0EA"/>
+                </a:solidFill>
+                <a:latin typeface="Georgia" pitchFamily="34" charset="0"/>
+                <a:ea typeface="Georgia" pitchFamily="34" charset="-122"/>
+                <a:cs typeface="Georgia" pitchFamily="34" charset="-120"/>
+              </a:rPr>
+              <a:t>: o poema fala da própria poesia? E sempre: </a:t>
+            </a:r>
+            <a:pPr indent="0" marL="0">
+              <a:lnSpc>
+                <a:spcPct val="120000"/>
+              </a:lnSpc>
+              <a:spcAft>
+                <a:spcPts val="1000"/>
+              </a:spcAft>
+              <a:buNone/>
+            </a:pPr>
+            <a:r>
+              <a:rPr lang="en-US" sz="2300" dirty="0">
+                <a:solidFill>
+                  <a:srgbClr val="F2F0EA"/>
+                </a:solidFill>
+                <a:latin typeface="Georgia" pitchFamily="34" charset="0"/>
+                <a:ea typeface="Georgia" pitchFamily="34" charset="-122"/>
+                <a:cs typeface="Georgia" pitchFamily="34" charset="-120"/>
+              </a:rPr>
+              <a:t>forma</a:t>
+            </a:r>
+            <a:pPr indent="0" marL="0">
+              <a:lnSpc>
+                <a:spcPct val="120000"/>
+              </a:lnSpc>
+              <a:spcAft>
+                <a:spcPts val="1000"/>
+              </a:spcAft>
+              <a:buNone/>
+            </a:pPr>
+            <a:r>
+              <a:rPr lang="en-US" sz="2300" b="1" dirty="0">
+                <a:solidFill>
+                  <a:srgbClr val="F2F0EA"/>
+                </a:solidFill>
+                <a:latin typeface="Georgia" pitchFamily="34" charset="0"/>
+                <a:ea typeface="Georgia" pitchFamily="34" charset="-122"/>
+                <a:cs typeface="Georgia" pitchFamily="34" charset="-120"/>
+              </a:rPr>
+              <a:t> (estrofes, métrica, rima ou verso livre) e </a:t>
+            </a:r>
+            <a:pPr indent="0" marL="0">
+              <a:lnSpc>
+                <a:spcPct val="120000"/>
+              </a:lnSpc>
+              <a:spcAft>
+                <a:spcPts val="1000"/>
+              </a:spcAft>
+              <a:buNone/>
+            </a:pPr>
+            <a:r>
+              <a:rPr lang="en-US" sz="2300" dirty="0">
+                <a:solidFill>
+                  <a:srgbClr val="F2F0EA"/>
+                </a:solidFill>
+                <a:latin typeface="Georgia" pitchFamily="34" charset="0"/>
+                <a:ea typeface="Georgia" pitchFamily="34" charset="-122"/>
+                <a:cs typeface="Georgia" pitchFamily="34" charset="-120"/>
+              </a:rPr>
+              <a:t>recursos expressivos**.</a:t>
             </a:r>
             <a:endParaRPr lang="en-US" sz="2300" dirty="0"/>
           </a:p>
